--- a/Chapter-3/Lesson-8/Lesson-8.pptx
+++ b/Chapter-3/Lesson-8/Lesson-8.pptx
@@ -10817,7 +10817,7 @@
           <a:p>
             <a:fld id="{7E3D4EF1-0385-43D3-A179-699E3F2FE344}" type="datetime1">
               <a:rPr lang="en-IN" smtClean="0"/>
-              <a:t>31-01-2026</a:t>
+              <a:t>03-02-2026</a:t>
             </a:fld>
             <a:endParaRPr lang="en-IN" dirty="0"/>
           </a:p>
@@ -19915,7 +19915,7 @@
         </p:nvSpPr>
         <p:spPr>
           <a:xfrm>
-            <a:off x="5951506" y="1338799"/>
+            <a:off x="5960250" y="1338798"/>
             <a:ext cx="1172933" cy="538739"/>
           </a:xfrm>
           <a:prstGeom prst="roundRect">
@@ -20193,7 +20193,7 @@
         <p:spPr>
           <a:xfrm flipV="1">
             <a:off x="5042804" y="1608168"/>
-            <a:ext cx="908703" cy="6601"/>
+            <a:ext cx="917446" cy="6601"/>
           </a:xfrm>
           <a:prstGeom prst="straightConnector1">
             <a:avLst/>
@@ -20459,7 +20459,7 @@
         </p:nvCxnSpPr>
         <p:spPr>
           <a:xfrm>
-            <a:off x="6537973" y="1877537"/>
+            <a:off x="6546717" y="1877536"/>
             <a:ext cx="0" cy="1584120"/>
           </a:xfrm>
           <a:prstGeom prst="straightConnector1">
